--- a/finaldemoppt/PRAMAAN_AICTE_SIH2026_FINAL.pptx
+++ b/finaldemoppt/PRAMAAN_AICTE_SIH2026_FINAL.pptx
@@ -5718,14 +5718,25 @@
         </p:nvSpPr>
         <p:spPr>
           <a:xfrm>
-            <a:off x="1245686" y="648614"/>
-            <a:ext cx="8534400" cy="1752600"/>
-          </a:xfrm>
-        </p:spPr>
-        <p:txBody>
-          <a:bodyPr/>
+            <a:off x="365760" y="868680"/>
+            <a:ext cx="5943600" cy="365760"/>
+          </a:xfrm>
+        </p:spPr>
+        <p:txBody>
+          <a:bodyPr wrap="square"/>
           <a:lstStyle/>
           <a:p>
+            <a:pPr algn="l">
+              <a:defRPr sz="1400" b="1">
+                <a:solidFill>
+                  <a:srgbClr val="008C6E"/>
+                </a:solidFill>
+                <a:latin typeface="Arial"/>
+              </a:defRPr>
+            </a:pPr>
+            <a:r>
+              <a:t>TITLE PAGE</a:t>
+            </a:r>
             <a:endParaRPr lang="en-US" b="1" dirty="0">
               <a:solidFill>
                 <a:schemeClr val="tx1"/>
@@ -5748,21 +5759,23 @@
         </p:nvSpPr>
         <p:spPr>
           <a:xfrm>
-            <a:off x="331286" y="-526757"/>
-            <a:ext cx="10363200" cy="2076450"/>
-          </a:xfrm>
-        </p:spPr>
-        <p:txBody>
-          <a:bodyPr/>
+            <a:off x="365760" y="182880"/>
+            <a:ext cx="9326880" cy="822960"/>
+          </a:xfrm>
+        </p:spPr>
+        <p:txBody>
+          <a:bodyPr wrap="square"/>
           <a:lstStyle/>
           <a:p>
-            <a:r>
-              <a:rPr lang="en-US" sz="4000" b="1" dirty="0">
-                <a:solidFill>
-                  <a:schemeClr val="tx2"/>
-                </a:solidFill>
-                <a:latin typeface="Garamond" panose="02020404030301010803" pitchFamily="18" charset="0"/>
-              </a:rPr>
+            <a:pPr algn="l">
+              <a:defRPr sz="2800" b="1">
+                <a:solidFill>
+                  <a:srgbClr val="112266"/>
+                </a:solidFill>
+                <a:latin typeface="Arial"/>
+              </a:defRPr>
+            </a:pPr>
+            <a:r>
               <a:t>SMART INDIA HACKATHON 2026</a:t>
             </a:r>
             <a:endParaRPr lang="en-IN" sz="4000" b="1" dirty="0">
@@ -5782,8 +5795,8 @@
         </p:nvSpPr>
         <p:spPr>
           <a:xfrm>
-            <a:off x="457200" y="1371600"/>
-            <a:ext cx="6035040" cy="4846320"/>
+            <a:off x="365760" y="1417320"/>
+            <a:ext cx="6217920" cy="4800600"/>
           </a:xfrm>
           <a:prstGeom prst="rect">
             <a:avLst/>
@@ -5802,7 +5815,7 @@
               </a:spcBef>
             </a:pPr>
             <a:r>
-              <a:rPr sz="1100" b="1">
+              <a:rPr sz="1080" b="1">
                 <a:solidFill>
                   <a:srgbClr val="112266"/>
                 </a:solidFill>
@@ -5811,7 +5824,7 @@
               <a:t>Problem Statement ID: </a:t>
             </a:r>
             <a:r>
-              <a:rPr sz="1350" b="1">
+              <a:rPr sz="1300" b="1">
                 <a:solidFill>
                   <a:srgbClr val="112266"/>
                 </a:solidFill>
@@ -5824,11 +5837,11 @@
           <a:p>
             <a:pPr>
               <a:spcBef>
-                <a:spcPts val="450"/>
+                <a:spcPts val="400"/>
               </a:spcBef>
             </a:pPr>
             <a:r>
-              <a:rPr sz="1100" b="1">
+              <a:rPr sz="1080" b="1">
                 <a:solidFill>
                   <a:srgbClr val="112266"/>
                 </a:solidFill>
@@ -5849,11 +5862,11 @@
           <a:p>
             <a:pPr>
               <a:spcBef>
-                <a:spcPts val="450"/>
+                <a:spcPts val="400"/>
               </a:spcBef>
             </a:pPr>
             <a:r>
-              <a:rPr sz="1100" b="1">
+              <a:rPr sz="1080" b="1">
                 <a:solidFill>
                   <a:srgbClr val="112266"/>
                 </a:solidFill>
@@ -5862,7 +5875,7 @@
               <a:t>Theme: </a:t>
             </a:r>
             <a:r>
-              <a:rPr sz="1150" b="0">
+              <a:rPr sz="1100" b="0">
                 <a:solidFill>
                   <a:srgbClr val="222222"/>
                 </a:solidFill>
@@ -5874,11 +5887,11 @@
           <a:p>
             <a:pPr>
               <a:spcBef>
-                <a:spcPts val="450"/>
+                <a:spcPts val="400"/>
               </a:spcBef>
             </a:pPr>
             <a:r>
-              <a:rPr sz="1100" b="1">
+              <a:rPr sz="1080" b="1">
                 <a:solidFill>
                   <a:srgbClr val="112266"/>
                 </a:solidFill>
@@ -5887,7 +5900,7 @@
               <a:t>PS Category: </a:t>
             </a:r>
             <a:r>
-              <a:rPr sz="1150" b="0">
+              <a:rPr sz="1100" b="0">
                 <a:solidFill>
                   <a:srgbClr val="222222"/>
                 </a:solidFill>
@@ -5899,11 +5912,11 @@
           <a:p>
             <a:pPr>
               <a:spcBef>
-                <a:spcPts val="450"/>
+                <a:spcPts val="400"/>
               </a:spcBef>
             </a:pPr>
             <a:r>
-              <a:rPr sz="1100" b="1">
+              <a:rPr sz="1080" b="1">
                 <a:solidFill>
                   <a:srgbClr val="112266"/>
                 </a:solidFill>
@@ -5912,7 +5925,7 @@
               <a:t>Team ID: </a:t>
             </a:r>
             <a:r>
-              <a:rPr sz="1150" b="0">
+              <a:rPr sz="1100" b="0">
                 <a:solidFill>
                   <a:srgbClr val="222222"/>
                 </a:solidFill>
@@ -5924,11 +5937,11 @@
           <a:p>
             <a:pPr>
               <a:spcBef>
-                <a:spcPts val="450"/>
+                <a:spcPts val="400"/>
               </a:spcBef>
             </a:pPr>
             <a:r>
-              <a:rPr sz="1100" b="1">
+              <a:rPr sz="1080" b="1">
                 <a:solidFill>
                   <a:srgbClr val="112266"/>
                 </a:solidFill>
@@ -5937,7 +5950,7 @@
               <a:t>Team Name: </a:t>
             </a:r>
             <a:r>
-              <a:rPr sz="1200" b="1">
+              <a:rPr sz="1150" b="1">
                 <a:solidFill>
                   <a:srgbClr val="112266"/>
                 </a:solidFill>
@@ -5949,42 +5962,42 @@
           <a:p>
             <a:pPr>
               <a:spcBef>
-                <a:spcPts val="450"/>
+                <a:spcPts val="400"/>
               </a:spcBef>
             </a:pPr>
             <a:r>
-              <a:rPr sz="1100" b="1">
+              <a:rPr sz="1080" b="1">
                 <a:solidFill>
                   <a:srgbClr val="112266"/>
                 </a:solidFill>
                 <a:latin typeface="Arial"/>
               </a:rPr>
-              <a:t>Live Web Platform: </a:t>
-            </a:r>
-            <a:r>
-              <a:rPr sz="1100" b="1">
-                <a:solidFill>
-                  <a:srgbClr val="008C6E"/>
-                </a:solidFill>
-                <a:latin typeface="Arial"/>
-              </a:rPr>
-              <a:t>https://brainforge.info  |  https://pramaan.brainforge.info</a:t>
+              <a:t>Institute Name: </a:t>
+            </a:r>
+            <a:r>
+              <a:rPr sz="1100" b="0">
+                <a:solidFill>
+                  <a:srgbClr val="1A365D"/>
+                </a:solidFill>
+                <a:latin typeface="Arial"/>
+              </a:rPr>
+              <a:t>Thiagarajar College of Engineering, Madurai, Tamil Nadu</a:t>
             </a:r>
           </a:p>
           <a:p>
             <a:pPr>
               <a:spcBef>
-                <a:spcPts val="450"/>
+                <a:spcPts val="400"/>
               </a:spcBef>
             </a:pPr>
             <a:r>
-              <a:rPr sz="1100" b="1">
+              <a:rPr sz="1080" b="1">
                 <a:solidFill>
                   <a:srgbClr val="112266"/>
                 </a:solidFill>
                 <a:latin typeface="Arial"/>
               </a:rPr>
-              <a:t>Live Backend &amp; API: </a:t>
+              <a:t>Live Web Platform: </a:t>
             </a:r>
             <a:r>
               <a:rPr sz="1050" b="1">
@@ -5993,67 +6006,67 @@
                 </a:solidFill>
                 <a:latin typeface="Arial"/>
               </a:rPr>
-              <a:t>https://apaar-id-based-system.onrender.com/docs</a:t>
+              <a:t>https://brainforge.info  |  https://pramaan.brainforge.info</a:t>
             </a:r>
           </a:p>
           <a:p>
             <a:pPr>
               <a:spcBef>
-                <a:spcPts val="450"/>
+                <a:spcPts val="400"/>
               </a:spcBef>
             </a:pPr>
             <a:r>
-              <a:rPr sz="1100" b="1">
+              <a:rPr sz="1080" b="1">
                 <a:solidFill>
                   <a:srgbClr val="112266"/>
                 </a:solidFill>
                 <a:latin typeface="Arial"/>
               </a:rPr>
-              <a:t>Source Repository: </a:t>
+              <a:t>Live Backend &amp; API: </a:t>
             </a:r>
             <a:r>
               <a:rPr sz="1050" b="1">
                 <a:solidFill>
-                  <a:srgbClr val="1A56DB"/>
-                </a:solidFill>
-                <a:latin typeface="Arial"/>
-              </a:rPr>
-              <a:t>https://github.com/naveeshpcbin/APAAR-ID-BASED-SYSTEM</a:t>
+                  <a:srgbClr val="008C6E"/>
+                </a:solidFill>
+                <a:latin typeface="Arial"/>
+              </a:rPr>
+              <a:t>https://apaar-id-based-system.onrender.com/docs</a:t>
             </a:r>
           </a:p>
           <a:p>
             <a:pPr>
               <a:spcBef>
-                <a:spcPts val="450"/>
+                <a:spcPts val="400"/>
               </a:spcBef>
             </a:pPr>
             <a:r>
-              <a:rPr sz="1100" b="1">
+              <a:rPr sz="1080" b="1">
                 <a:solidFill>
                   <a:srgbClr val="112266"/>
                 </a:solidFill>
                 <a:latin typeface="Arial"/>
               </a:rPr>
-              <a:t>Architecture Baseline: </a:t>
-            </a:r>
-            <a:r>
-              <a:rPr sz="1000" b="0">
-                <a:solidFill>
-                  <a:srgbClr val="1A365D"/>
-                </a:solidFill>
-                <a:latin typeface="Arial"/>
-              </a:rPr>
-              <a:t>Next.js 14 + FastAPI + PostgreSQL (20 Tables, RLS) + Deterministic 3-Way Reconciliation</a:t>
+              <a:t>Source Repository: </a:t>
+            </a:r>
+            <a:r>
+              <a:rPr sz="1050" b="1">
+                <a:solidFill>
+                  <a:srgbClr val="1A56DB"/>
+                </a:solidFill>
+                <a:latin typeface="Arial"/>
+              </a:rPr>
+              <a:t>https://github.com/naveeshpcbin/APAAR-ID-BASED-SYSTEM</a:t>
             </a:r>
           </a:p>
           <a:p>
             <a:pPr>
               <a:spcBef>
-                <a:spcPts val="450"/>
+                <a:spcPts val="400"/>
               </a:spcBef>
             </a:pPr>
             <a:r>
-              <a:rPr sz="1100" b="1">
+              <a:rPr sz="1080" b="1">
                 <a:solidFill>
                   <a:srgbClr val="112266"/>
                 </a:solidFill>
@@ -6068,7 +6081,7 @@
                 </a:solidFill>
                 <a:latin typeface="Arial"/>
               </a:rPr>
-              <a:t>66/66 Passing Tests | 20/20 E2E Checks | Live Cloud Deployment Verified</a:t>
+              <a:t>66/66 Passing Tests | 20 Tables with RLS | Live Cloud Verified</a:t>
             </a:r>
           </a:p>
         </p:txBody>
@@ -6105,25 +6118,23 @@
       </p:pic>
       <p:sp>
         <p:nvSpPr>
-          <p:cNvPr id="38" name="Rounded Rectangle 37"/>
+          <p:cNvPr id="38" name="Rectangle 37"/>
           <p:cNvSpPr/>
           <p:nvPr/>
         </p:nvSpPr>
         <p:spPr>
           <a:xfrm>
-            <a:off x="6675120" y="1371600"/>
-            <a:ext cx="5120640" cy="4846320"/>
-          </a:xfrm>
-          <a:prstGeom prst="roundRect">
+            <a:off x="0" y="6355080"/>
+            <a:ext cx="12191695" cy="502920"/>
+          </a:xfrm>
+          <a:prstGeom prst="rect">
             <a:avLst/>
           </a:prstGeom>
           <a:solidFill>
-            <a:srgbClr val="FFFFFF"/>
+            <a:srgbClr val="006FBF"/>
           </a:solidFill>
-          <a:ln w="15240">
-            <a:solidFill>
-              <a:srgbClr val="CBD5E1"/>
-            </a:solidFill>
+          <a:ln>
+            <a:noFill/>
           </a:ln>
         </p:spPr>
         <p:style>
@@ -6150,103 +6161,7 @@
       </p:sp>
       <p:sp>
         <p:nvSpPr>
-          <p:cNvPr id="39" name="Rounded Rectangle 38"/>
-          <p:cNvSpPr/>
-          <p:nvPr/>
-        </p:nvSpPr>
-        <p:spPr>
-          <a:xfrm>
-            <a:off x="6812280" y="1261872"/>
-            <a:ext cx="4846320" cy="292608"/>
-          </a:xfrm>
-          <a:prstGeom prst="roundRect">
-            <a:avLst/>
-          </a:prstGeom>
-          <a:solidFill>
-            <a:srgbClr val="112266"/>
-          </a:solidFill>
-          <a:ln>
-            <a:noFill/>
-          </a:ln>
-        </p:spPr>
-        <p:style>
-          <a:lnRef idx="1">
-            <a:schemeClr val="accent1"/>
-          </a:lnRef>
-          <a:fillRef idx="3">
-            <a:schemeClr val="accent1"/>
-          </a:fillRef>
-          <a:effectRef idx="2">
-            <a:schemeClr val="accent1"/>
-          </a:effectRef>
-          <a:fontRef idx="minor">
-            <a:schemeClr val="lt1"/>
-          </a:fontRef>
-        </p:style>
-        <p:txBody>
-          <a:bodyPr rtlCol="0" anchor="ctr" wrap="none" lIns="73152" rIns="73152" tIns="9144" bIns="9144"/>
-          <a:lstStyle/>
-          <a:p>
-            <a:pPr algn="ctr">
-              <a:defRPr sz="950" b="1">
-                <a:solidFill>
-                  <a:srgbClr val="FFFFFF"/>
-                </a:solidFill>
-                <a:latin typeface="Arial"/>
-              </a:defRPr>
-            </a:pPr>
-            <a:r>
-              <a:t>DEPLOYED &amp; VERIFIED SYSTEM ARCHITECTURE</a:t>
-            </a:r>
-          </a:p>
-        </p:txBody>
-      </p:sp>
-      <p:sp>
-        <p:nvSpPr>
-          <p:cNvPr id="40" name="Rectangle 39"/>
-          <p:cNvSpPr/>
-          <p:nvPr/>
-        </p:nvSpPr>
-        <p:spPr>
-          <a:xfrm>
-            <a:off x="0" y="6355080"/>
-            <a:ext cx="12191695" cy="502920"/>
-          </a:xfrm>
-          <a:prstGeom prst="rect">
-            <a:avLst/>
-          </a:prstGeom>
-          <a:solidFill>
-            <a:srgbClr val="006FBF"/>
-          </a:solidFill>
-          <a:ln>
-            <a:noFill/>
-          </a:ln>
-        </p:spPr>
-        <p:style>
-          <a:lnRef idx="1">
-            <a:schemeClr val="accent1"/>
-          </a:lnRef>
-          <a:fillRef idx="3">
-            <a:schemeClr val="accent1"/>
-          </a:fillRef>
-          <a:effectRef idx="2">
-            <a:schemeClr val="accent1"/>
-          </a:effectRef>
-          <a:fontRef idx="minor">
-            <a:schemeClr val="lt1"/>
-          </a:fontRef>
-        </p:style>
-        <p:txBody>
-          <a:bodyPr rtlCol="0" anchor="ctr"/>
-          <a:lstStyle/>
-          <a:p>
-            <a:pPr algn="ctr"/>
-          </a:p>
-        </p:txBody>
-      </p:sp>
-      <p:sp>
-        <p:nvSpPr>
-          <p:cNvPr id="41" name="TextBox 40"/>
+          <p:cNvPr id="39" name="TextBox 38"/>
           <p:cNvSpPr txBox="1"/>
           <p:nvPr/>
         </p:nvSpPr>
@@ -6282,7 +6197,7 @@
       </p:sp>
       <p:sp>
         <p:nvSpPr>
-          <p:cNvPr id="42" name="TextBox 41"/>
+          <p:cNvPr id="40" name="TextBox 39"/>
           <p:cNvSpPr txBox="1"/>
           <p:nvPr/>
         </p:nvSpPr>
@@ -7334,9 +7249,33 @@
           </a:p>
         </p:txBody>
       </p:sp>
-      <p:sp>
-        <p:nvSpPr>
-          <p:cNvPr id="15373" name="TextBox 15372"/>
+      <p:pic>
+        <p:nvPicPr>
+          <p:cNvPr id="15373" name="Picture 15372" descr="slide_2_Picture 3.png"/>
+          <p:cNvPicPr>
+            <a:picLocks noChangeAspect="1"/>
+          </p:cNvPicPr>
+          <p:nvPr/>
+        </p:nvPicPr>
+        <p:blipFill>
+          <a:blip r:embed="rId4"/>
+          <a:stretch>
+            <a:fillRect/>
+          </a:stretch>
+        </p:blipFill>
+        <p:spPr>
+          <a:xfrm>
+            <a:off x="6281928" y="1353312"/>
+            <a:ext cx="5404104" cy="2926080"/>
+          </a:xfrm>
+          <a:prstGeom prst="rect">
+            <a:avLst/>
+          </a:prstGeom>
+        </p:spPr>
+      </p:pic>
+      <p:sp>
+        <p:nvSpPr>
+          <p:cNvPr id="15374" name="TextBox 15373"/>
           <p:cNvSpPr txBox="1"/>
           <p:nvPr/>
         </p:nvSpPr>
@@ -7434,7 +7373,7 @@
       </p:sp>
       <p:sp>
         <p:nvSpPr>
-          <p:cNvPr id="15374" name="Rounded Rectangle 15373"/>
+          <p:cNvPr id="15375" name="Rounded Rectangle 15374"/>
           <p:cNvSpPr/>
           <p:nvPr/>
         </p:nvSpPr>
@@ -7489,7 +7428,7 @@
       </p:sp>
       <p:sp>
         <p:nvSpPr>
-          <p:cNvPr id="15375" name="Rounded Rectangle 15374"/>
+          <p:cNvPr id="15376" name="Rounded Rectangle 15375"/>
           <p:cNvSpPr/>
           <p:nvPr/>
         </p:nvSpPr>
@@ -7544,7 +7483,7 @@
       </p:sp>
       <p:sp>
         <p:nvSpPr>
-          <p:cNvPr id="15376" name="Rounded Rectangle 15375"/>
+          <p:cNvPr id="15377" name="Rounded Rectangle 15376"/>
           <p:cNvSpPr/>
           <p:nvPr/>
         </p:nvSpPr>
@@ -7599,7 +7538,7 @@
       </p:sp>
       <p:sp>
         <p:nvSpPr>
-          <p:cNvPr id="15377" name="Rounded Rectangle 15376"/>
+          <p:cNvPr id="15378" name="Rounded Rectangle 15377"/>
           <p:cNvSpPr/>
           <p:nvPr/>
         </p:nvSpPr>
@@ -8827,14 +8766,14 @@
               </a:defRPr>
             </a:pPr>
             <a:r>
-              <a:t>INTERACTIVE QUARANTINE SANDBOX &amp; ROW-LEVEL FINDINGS</a:t>
+              <a:t>PROTOTYPE EVIDENCE: SMART INGESTION DESK</a:t>
             </a:r>
           </a:p>
         </p:txBody>
       </p:sp>
       <p:pic>
         <p:nvPicPr>
-          <p:cNvPr id="17427" name="Picture 17426" descr="07_interactive_spreadsheet_sandbox.png"/>
+          <p:cNvPr id="17427" name="Picture 17426" descr="slide_3_Picture 3.png"/>
           <p:cNvPicPr>
             <a:picLocks noChangeAspect="1"/>
           </p:cNvPicPr>
@@ -8849,7 +8788,7 @@
         <p:spPr>
           <a:xfrm>
             <a:off x="6281928" y="3493008"/>
-            <a:ext cx="5404104" cy="2194560"/>
+            <a:ext cx="5404104" cy="1965960"/>
           </a:xfrm>
           <a:prstGeom prst="rect">
             <a:avLst/>
@@ -8864,8 +8803,8 @@
         </p:nvSpPr>
         <p:spPr>
           <a:xfrm>
-            <a:off x="6281928" y="5715000"/>
-            <a:ext cx="5404104" cy="320040"/>
+            <a:off x="6281928" y="5532120"/>
+            <a:ext cx="5404104" cy="457200"/>
           </a:xfrm>
           <a:prstGeom prst="rect">
             <a:avLst/>
@@ -8887,7 +8826,7 @@
               </a:defRPr>
             </a:pPr>
             <a:r>
-              <a:t>Implemented UI: In-browser editable spreadsheet sandbox isolates validation findings before central commit.</a:t>
+              <a:t>Smart Ingestion Desk: Automated schema mapping, pre-flight validation status, row findings ledger, and atomic batch commitment.</a:t>
             </a:r>
           </a:p>
         </p:txBody>
@@ -9521,7 +9460,7 @@
         <p:spPr>
           <a:xfrm>
             <a:off x="6172200" y="1115568"/>
-            <a:ext cx="5623560" cy="4956048"/>
+            <a:ext cx="5623560" cy="2066543"/>
           </a:xfrm>
           <a:prstGeom prst="roundRect">
             <a:avLst/>
@@ -9566,7 +9505,7 @@
         <p:spPr>
           <a:xfrm>
             <a:off x="6309360" y="1005840"/>
-            <a:ext cx="5349240" cy="292608"/>
+            <a:ext cx="5349240" cy="274320"/>
           </a:xfrm>
           <a:prstGeom prst="roundRect">
             <a:avLst/>
@@ -9618,8 +9557,8 @@
         </p:nvSpPr>
         <p:spPr>
           <a:xfrm>
-            <a:off x="6309360" y="1371600"/>
-            <a:ext cx="5349240" cy="4572000"/>
+            <a:off x="6309360" y="1353312"/>
+            <a:ext cx="5349240" cy="1755648"/>
           </a:xfrm>
           <a:prstGeom prst="rect">
             <a:avLst/>
@@ -9638,247 +9577,230 @@
               </a:spcBef>
             </a:pPr>
             <a:r>
-              <a:rPr sz="869" b="1">
+              <a:rPr sz="850" b="1">
                 <a:solidFill>
                   <a:srgbClr val="B42828"/>
                 </a:solidFill>
                 <a:latin typeface="Arial"/>
               </a:rPr>
-              <a:t>- Risk: Inconsistent Institutional Spreadsheets: </a:t>
-            </a:r>
-            <a:r>
-              <a:rPr sz="819">
+              <a:t>- Inconsistent Spreadsheets: </a:t>
+            </a:r>
+            <a:r>
+              <a:rPr sz="800">
                 <a:solidFill>
                   <a:srgbClr val="222222"/>
                 </a:solidFill>
                 <a:latin typeface="Arial"/>
               </a:rPr>
-              <a:t>Colleges use varying ERP schemas and column headers (e.g. apaar_id vs uid vs student_apaar).</a:t>
+              <a:t>Colleges use varying ERP column headers. -&gt; Control: Header alias normalizer maps 50+ divergent column variants into standard canonical schema.</a:t>
             </a:r>
           </a:p>
           <a:p>
             <a:pPr>
               <a:spcBef>
-                <a:spcPts val="150"/>
+                <a:spcPts val="350"/>
               </a:spcBef>
             </a:pPr>
             <a:r>
               <a:rPr sz="850" b="1">
                 <a:solidFill>
-                  <a:srgbClr val="008C6E"/>
-                </a:solidFill>
-                <a:latin typeface="Arial"/>
-              </a:rPr>
-              <a:t>  * Control: </a:t>
-            </a:r>
-            <a:r>
-              <a:rPr sz="819">
+                  <a:srgbClr val="B42828"/>
+                </a:solidFill>
+                <a:latin typeface="Arial"/>
+              </a:rPr>
+              <a:t>- Identifier Privacy Exposure: </a:t>
+            </a:r>
+            <a:r>
+              <a:rPr sz="800">
                 <a:solidFill>
                   <a:srgbClr val="222222"/>
                 </a:solidFill>
                 <a:latin typeface="Arial"/>
               </a:rPr>
-              <a:t>Header alias normalizer maps 50+ divergent column variants into standard canonical schema automatically.</a:t>
+              <a:t>Storing plaintext student APAAR IDs risks data leakage. -&gt; Control: Keyed HMAC-SHA256 pseudonymized indexing and dynamic masking ensure zero plaintext PII exposure.</a:t>
             </a:r>
           </a:p>
           <a:p>
             <a:pPr>
               <a:spcBef>
-                <a:spcPts val="600"/>
+                <a:spcPts val="350"/>
               </a:spcBef>
             </a:pPr>
             <a:r>
-              <a:rPr sz="869" b="1">
+              <a:rPr sz="850" b="1">
                 <a:solidFill>
                   <a:srgbClr val="B42828"/>
                 </a:solidFill>
                 <a:latin typeface="Arial"/>
               </a:rPr>
-              <a:t>- Risk: Student Identifier Privacy Exposure: </a:t>
-            </a:r>
-            <a:r>
-              <a:rPr sz="819">
+              <a:t>- Concurrent Admissions: </a:t>
+            </a:r>
+            <a:r>
+              <a:rPr sz="800">
                 <a:solidFill>
                   <a:srgbClr val="222222"/>
                 </a:solidFill>
                 <a:latin typeface="Arial"/>
               </a:rPr>
-              <a:t>Storing plaintext 12-digit student APAAR identifiers risks data leakage under DPDP Act 2023.</a:t>
-            </a:r>
-          </a:p>
-          <a:p>
-            <a:pPr>
-              <a:spcBef>
-                <a:spcPts val="150"/>
-              </a:spcBef>
-            </a:pPr>
-            <a:r>
-              <a:rPr sz="850" b="1">
-                <a:solidFill>
-                  <a:srgbClr val="008C6E"/>
-                </a:solidFill>
-                <a:latin typeface="Arial"/>
-              </a:rPr>
-              <a:t>  * Control: </a:t>
-            </a:r>
-            <a:r>
-              <a:rPr sz="819">
-                <a:solidFill>
-                  <a:srgbClr val="222222"/>
-                </a:solidFill>
-                <a:latin typeface="Arial"/>
-              </a:rPr>
-              <a:t>Keyed HMAC-SHA256 pseudonymized indexing and dynamic masking (XXXX-XXXX-9012) ensure zero plaintext PII exposure.</a:t>
-            </a:r>
-          </a:p>
-          <a:p>
-            <a:pPr>
-              <a:spcBef>
-                <a:spcPts val="600"/>
-              </a:spcBef>
-            </a:pPr>
-            <a:r>
-              <a:rPr sz="869" b="1">
-                <a:solidFill>
-                  <a:srgbClr val="B42828"/>
-                </a:solidFill>
-                <a:latin typeface="Arial"/>
-              </a:rPr>
-              <a:t>- Risk: Multi-Institution Concurrent Admissions: </a:t>
-            </a:r>
-            <a:r>
-              <a:rPr sz="819">
-                <a:solidFill>
-                  <a:srgbClr val="222222"/>
-                </a:solidFill>
-                <a:latin typeface="Arial"/>
-              </a:rPr>
-              <a:t>Students admitted concurrently across different institutions leading to seat blocking.</a:t>
-            </a:r>
-          </a:p>
-          <a:p>
-            <a:pPr>
-              <a:spcBef>
-                <a:spcPts val="150"/>
-              </a:spcBef>
-            </a:pPr>
-            <a:r>
-              <a:rPr sz="850" b="1">
-                <a:solidFill>
-                  <a:srgbClr val="008C6E"/>
-                </a:solidFill>
-                <a:latin typeface="Arial"/>
-              </a:rPr>
-              <a:t>  * Control: </a:t>
-            </a:r>
-            <a:r>
-              <a:rPr sz="819">
-                <a:solidFill>
-                  <a:srgbClr val="222222"/>
-                </a:solidFill>
-                <a:latin typeface="Arial"/>
-              </a:rPr>
-              <a:t>Cross-institution collision radar cross-checks active admissions against centralized reference records and flags duplicates.</a:t>
-            </a:r>
-          </a:p>
-          <a:p>
-            <a:pPr>
-              <a:spcBef>
-                <a:spcPts val="600"/>
-              </a:spcBef>
-            </a:pPr>
-            <a:r>
-              <a:rPr sz="869" b="1">
-                <a:solidFill>
-                  <a:srgbClr val="B42828"/>
-                </a:solidFill>
-                <a:latin typeface="Arial"/>
-              </a:rPr>
-              <a:t>- Risk: Regulatory Non-Repudiation &amp; Tampering: </a:t>
-            </a:r>
-            <a:r>
-              <a:rPr sz="819">
-                <a:solidFill>
-                  <a:srgbClr val="222222"/>
-                </a:solidFill>
-                <a:latin typeface="Arial"/>
-              </a:rPr>
-              <a:t>Unauthorized insider tampering with approved intake capacity or admission records.</a:t>
-            </a:r>
-          </a:p>
-          <a:p>
-            <a:pPr>
-              <a:spcBef>
-                <a:spcPts val="150"/>
-              </a:spcBef>
-            </a:pPr>
-            <a:r>
-              <a:rPr sz="850" b="1">
-                <a:solidFill>
-                  <a:srgbClr val="008C6E"/>
-                </a:solidFill>
-                <a:latin typeface="Arial"/>
-              </a:rPr>
-              <a:t>  * Control: </a:t>
-            </a:r>
-            <a:r>
-              <a:rPr sz="819">
-                <a:solidFill>
-                  <a:srgbClr val="222222"/>
-                </a:solidFill>
-                <a:latin typeface="Arial"/>
-              </a:rPr>
-              <a:t>Append-only sequential SHA-256 hash chaining (Hash_n = SHA256(Record_n || Hash_n-1)) mathematically exposes any tampering.</a:t>
-            </a:r>
-          </a:p>
-          <a:p>
-            <a:pPr>
-              <a:spcBef>
-                <a:spcPts val="600"/>
-              </a:spcBef>
-            </a:pPr>
-            <a:r>
-              <a:rPr sz="869" b="1">
-                <a:solidFill>
-                  <a:srgbClr val="B42828"/>
-                </a:solidFill>
-                <a:latin typeface="Arial"/>
-              </a:rPr>
-              <a:t>- Risk: Database Driver &amp; Cloud Connection Mismatch: </a:t>
-            </a:r>
-            <a:r>
-              <a:rPr sz="819">
-                <a:solidFill>
-                  <a:srgbClr val="222222"/>
-                </a:solidFill>
-                <a:latin typeface="Arial"/>
-              </a:rPr>
-              <a:t>Container deployment failures caused by PostgreSQL driver compatibility or pooler SSL configuration.</a:t>
-            </a:r>
-          </a:p>
-          <a:p>
-            <a:pPr>
-              <a:spcBef>
-                <a:spcPts val="150"/>
-              </a:spcBef>
-            </a:pPr>
-            <a:r>
-              <a:rPr sz="850" b="1">
-                <a:solidFill>
-                  <a:srgbClr val="008C6E"/>
-                </a:solidFill>
-                <a:latin typeface="Arial"/>
-              </a:rPr>
-              <a:t>  * Control: </a:t>
-            </a:r>
-            <a:r>
-              <a:rPr sz="819">
-                <a:solidFill>
-                  <a:srgbClr val="222222"/>
-                </a:solidFill>
-                <a:latin typeface="Arial"/>
-              </a:rPr>
-              <a:t>Implemented smart connection URI sanitization and dynamic psycopg3/psycopg2 driver fallback with automated readiness health check.</a:t>
+              <a:t>Students admitted concurrently across different institutions. -&gt; Control: Cross-institution collision radar cross-checks active admissions against central records and flags duplicates.</a:t>
+            </a:r>
+          </a:p>
+        </p:txBody>
+      </p:sp>
+      <p:sp>
+        <p:nvSpPr>
+          <p:cNvPr id="17416" name="Rounded Rectangle 17415"/>
+          <p:cNvSpPr/>
+          <p:nvPr/>
+        </p:nvSpPr>
+        <p:spPr>
+          <a:xfrm>
+            <a:off x="6172200" y="3291840"/>
+            <a:ext cx="5623560" cy="2779776"/>
+          </a:xfrm>
+          <a:prstGeom prst="roundRect">
+            <a:avLst/>
+          </a:prstGeom>
+          <a:solidFill>
+            <a:srgbClr val="FFFFFF"/>
+          </a:solidFill>
+          <a:ln w="15240">
+            <a:solidFill>
+              <a:srgbClr val="CBD5E1"/>
+            </a:solidFill>
+          </a:ln>
+        </p:spPr>
+        <p:style>
+          <a:lnRef idx="1">
+            <a:schemeClr val="accent1"/>
+          </a:lnRef>
+          <a:fillRef idx="3">
+            <a:schemeClr val="accent1"/>
+          </a:fillRef>
+          <a:effectRef idx="2">
+            <a:schemeClr val="accent1"/>
+          </a:effectRef>
+          <a:fontRef idx="minor">
+            <a:schemeClr val="lt1"/>
+          </a:fontRef>
+        </p:style>
+        <p:txBody>
+          <a:bodyPr rtlCol="0" anchor="ctr"/>
+          <a:lstStyle/>
+          <a:p>
+            <a:pPr algn="ctr"/>
+          </a:p>
+        </p:txBody>
+      </p:sp>
+      <p:sp>
+        <p:nvSpPr>
+          <p:cNvPr id="17417" name="Rounded Rectangle 17416"/>
+          <p:cNvSpPr/>
+          <p:nvPr/>
+        </p:nvSpPr>
+        <p:spPr>
+          <a:xfrm>
+            <a:off x="6309360" y="3182112"/>
+            <a:ext cx="5349240" cy="274320"/>
+          </a:xfrm>
+          <a:prstGeom prst="roundRect">
+            <a:avLst/>
+          </a:prstGeom>
+          <a:solidFill>
+            <a:srgbClr val="008C6E"/>
+          </a:solidFill>
+          <a:ln>
+            <a:noFill/>
+          </a:ln>
+        </p:spPr>
+        <p:style>
+          <a:lnRef idx="1">
+            <a:schemeClr val="accent1"/>
+          </a:lnRef>
+          <a:fillRef idx="3">
+            <a:schemeClr val="accent1"/>
+          </a:fillRef>
+          <a:effectRef idx="2">
+            <a:schemeClr val="accent1"/>
+          </a:effectRef>
+          <a:fontRef idx="minor">
+            <a:schemeClr val="lt1"/>
+          </a:fontRef>
+        </p:style>
+        <p:txBody>
+          <a:bodyPr rtlCol="0" anchor="ctr" wrap="none" lIns="73152" rIns="73152" tIns="9144" bIns="9144"/>
+          <a:lstStyle/>
+          <a:p>
+            <a:pPr algn="ctr">
+              <a:defRPr sz="950" b="1">
+                <a:solidFill>
+                  <a:srgbClr val="FFFFFF"/>
+                </a:solidFill>
+                <a:latin typeface="Arial"/>
+              </a:defRPr>
+            </a:pPr>
+            <a:r>
+              <a:t>PROTOTYPE EVIDENCE: DUPLICATE COLLISION RADAR</a:t>
+            </a:r>
+          </a:p>
+        </p:txBody>
+      </p:sp>
+      <p:pic>
+        <p:nvPicPr>
+          <p:cNvPr id="17418" name="Picture 17417" descr="slide_4_Picture 3.png"/>
+          <p:cNvPicPr>
+            <a:picLocks noChangeAspect="1"/>
+          </p:cNvPicPr>
+          <p:nvPr/>
+        </p:nvPicPr>
+        <p:blipFill>
+          <a:blip r:embed="rId4"/>
+          <a:stretch>
+            <a:fillRect/>
+          </a:stretch>
+        </p:blipFill>
+        <p:spPr>
+          <a:xfrm>
+            <a:off x="6281928" y="3493008"/>
+            <a:ext cx="5404104" cy="1965960"/>
+          </a:xfrm>
+          <a:prstGeom prst="rect">
+            <a:avLst/>
+          </a:prstGeom>
+        </p:spPr>
+      </p:pic>
+      <p:sp>
+        <p:nvSpPr>
+          <p:cNvPr id="17419" name="TextBox 17418"/>
+          <p:cNvSpPr txBox="1"/>
+          <p:nvPr/>
+        </p:nvSpPr>
+        <p:spPr>
+          <a:xfrm>
+            <a:off x="6281928" y="5532120"/>
+            <a:ext cx="5404104" cy="457200"/>
+          </a:xfrm>
+          <a:prstGeom prst="rect">
+            <a:avLst/>
+          </a:prstGeom>
+          <a:noFill/>
+        </p:spPr>
+        <p:txBody>
+          <a:bodyPr wrap="square">
+            <a:spAutoFit/>
+          </a:bodyPr>
+          <a:lstStyle/>
+          <a:p>
+            <a:pPr algn="ctr">
+              <a:defRPr sz="780">
+                <a:solidFill>
+                  <a:srgbClr val="64748B"/>
+                </a:solidFill>
+                <a:latin typeface="Arial"/>
+              </a:defRPr>
+            </a:pPr>
+            <a:r>
+              <a:t>Duplicate Collision Radar: Side-by-side college enrollment audit, quota verification, and regulatory adjudication controls.</a:t>
             </a:r>
           </a:p>
         </p:txBody>
@@ -10601,14 +10523,38 @@
               </a:defRPr>
             </a:pPr>
             <a:r>
-              <a:t>CRYPTOGRAPHICALLY VERIFIABLE DEGREE CERTIFICATE &amp; QR PROOF</a:t>
-            </a:r>
-          </a:p>
-        </p:txBody>
-      </p:sp>
-      <p:sp>
-        <p:nvSpPr>
-          <p:cNvPr id="17415" name="TextBox 17414"/>
+              <a:t>SIH-R10 ACADEMIC CERTIFICATE &amp; ED25519 QR PROOF</a:t>
+            </a:r>
+          </a:p>
+        </p:txBody>
+      </p:sp>
+      <p:pic>
+        <p:nvPicPr>
+          <p:cNvPr id="17415" name="Picture 17414" descr="slide_5_Picture 3.png"/>
+          <p:cNvPicPr>
+            <a:picLocks noChangeAspect="1"/>
+          </p:cNvPicPr>
+          <p:nvPr/>
+        </p:nvPicPr>
+        <p:blipFill>
+          <a:blip r:embed="rId4"/>
+          <a:stretch>
+            <a:fillRect/>
+          </a:stretch>
+        </p:blipFill>
+        <p:spPr>
+          <a:xfrm>
+            <a:off x="6281928" y="1353312"/>
+            <a:ext cx="5404104" cy="2926080"/>
+          </a:xfrm>
+          <a:prstGeom prst="rect">
+            <a:avLst/>
+          </a:prstGeom>
+        </p:spPr>
+      </p:pic>
+      <p:sp>
+        <p:nvSpPr>
+          <p:cNvPr id="17416" name="TextBox 17415"/>
           <p:cNvSpPr txBox="1"/>
           <p:nvPr/>
         </p:nvSpPr>
@@ -11348,7 +11294,7 @@
         <p:spPr>
           <a:xfrm>
             <a:off x="6172200" y="1115568"/>
-            <a:ext cx="5623560" cy="2331720"/>
+            <a:ext cx="5623560" cy="2066543"/>
           </a:xfrm>
           <a:prstGeom prst="roundRect">
             <a:avLst/>
@@ -11446,7 +11392,7 @@
         <p:spPr>
           <a:xfrm>
             <a:off x="6309360" y="1353312"/>
-            <a:ext cx="5349240" cy="2011680"/>
+            <a:ext cx="5349240" cy="1755648"/>
           </a:xfrm>
           <a:prstGeom prst="rect">
             <a:avLst/>
@@ -11486,7 +11432,7 @@
           <a:p>
             <a:pPr>
               <a:spcBef>
-                <a:spcPts val="350"/>
+                <a:spcPts val="300"/>
               </a:spcBef>
             </a:pPr>
             <a:r>
@@ -11511,7 +11457,7 @@
           <a:p>
             <a:pPr>
               <a:spcBef>
-                <a:spcPts val="350"/>
+                <a:spcPts val="300"/>
               </a:spcBef>
             </a:pPr>
             <a:r>
@@ -11536,7 +11482,7 @@
           <a:p>
             <a:pPr>
               <a:spcBef>
-                <a:spcPts val="350"/>
+                <a:spcPts val="300"/>
               </a:spcBef>
             </a:pPr>
             <a:r>
@@ -11568,8 +11514,8 @@
         </p:nvSpPr>
         <p:spPr>
           <a:xfrm>
-            <a:off x="6172200" y="3611880"/>
-            <a:ext cx="5623560" cy="2459736"/>
+            <a:off x="6172200" y="3291840"/>
+            <a:ext cx="5623560" cy="2779776"/>
           </a:xfrm>
           <a:prstGeom prst="roundRect">
             <a:avLst/>
@@ -11613,7 +11559,7 @@
         </p:nvSpPr>
         <p:spPr>
           <a:xfrm>
-            <a:off x="6309360" y="3493008"/>
+            <a:off x="6309360" y="3182112"/>
             <a:ext cx="5349240" cy="274320"/>
           </a:xfrm>
           <a:prstGeom prst="roundRect">
@@ -11653,21 +11599,45 @@
               </a:defRPr>
             </a:pPr>
             <a:r>
-              <a:t>VERIFIED PROJECT RESOURCES &amp; LIVE DEPLOYMENT STATUS</a:t>
-            </a:r>
-          </a:p>
-        </p:txBody>
-      </p:sp>
-      <p:sp>
-        <p:nvSpPr>
-          <p:cNvPr id="17418" name="TextBox 17417"/>
+              <a:t>TAMPER-EVIDENT AUDIT LEDGER &amp; LIVE DEPLOYMENT</a:t>
+            </a:r>
+          </a:p>
+        </p:txBody>
+      </p:sp>
+      <p:pic>
+        <p:nvPicPr>
+          <p:cNvPr id="17418" name="Picture 17417" descr="slide_6_Picture 3.png"/>
+          <p:cNvPicPr>
+            <a:picLocks noChangeAspect="1"/>
+          </p:cNvPicPr>
+          <p:nvPr/>
+        </p:nvPicPr>
+        <p:blipFill>
+          <a:blip r:embed="rId4"/>
+          <a:stretch>
+            <a:fillRect/>
+          </a:stretch>
+        </p:blipFill>
+        <p:spPr>
+          <a:xfrm>
+            <a:off x="6281928" y="3493008"/>
+            <a:ext cx="5404104" cy="1371600"/>
+          </a:xfrm>
+          <a:prstGeom prst="rect">
+            <a:avLst/>
+          </a:prstGeom>
+        </p:spPr>
+      </p:pic>
+      <p:sp>
+        <p:nvSpPr>
+          <p:cNvPr id="17419" name="TextBox 17418"/>
           <p:cNvSpPr txBox="1"/>
           <p:nvPr/>
         </p:nvSpPr>
         <p:spPr>
           <a:xfrm>
-            <a:off x="6309360" y="3840480"/>
-            <a:ext cx="5349240" cy="2148840"/>
+            <a:off x="6281928" y="4919472"/>
+            <a:ext cx="5404104" cy="1097280"/>
           </a:xfrm>
           <a:prstGeom prst="rect">
             <a:avLst/>
@@ -11686,7 +11656,7 @@
               </a:spcBef>
             </a:pPr>
             <a:r>
-              <a:rPr sz="850" b="1">
+              <a:rPr sz="819" b="1">
                 <a:solidFill>
                   <a:srgbClr val="008C6E"/>
                 </a:solidFill>
@@ -11695,91 +11665,88 @@
               <a:t>- Live Web Platform: </a:t>
             </a:r>
             <a:r>
-              <a:rPr sz="800">
+              <a:rPr sz="780">
                 <a:solidFill>
                   <a:srgbClr val="222222"/>
                 </a:solidFill>
                 <a:latin typeface="Arial"/>
               </a:rPr>
-              <a:t>https://brainforge.info | https://pramaan.brainforge.info
-(Production Vercel Edge with custom domain &amp; Let's Encrypt SSL)</a:t>
+              <a:t>https://brainforge.info | https://pramaan.brainforge.info (Vercel Edge, SSL active)</a:t>
             </a:r>
           </a:p>
           <a:p>
             <a:pPr>
               <a:spcBef>
-                <a:spcPts val="350"/>
+                <a:spcPts val="200"/>
               </a:spcBef>
             </a:pPr>
             <a:r>
-              <a:rPr sz="850" b="1">
+              <a:rPr sz="819" b="1">
                 <a:solidFill>
                   <a:srgbClr val="008C6E"/>
                 </a:solidFill>
                 <a:latin typeface="Arial"/>
               </a:rPr>
-              <a:t>- Interactive Backend API &amp; Docs: </a:t>
-            </a:r>
-            <a:r>
-              <a:rPr sz="800">
+              <a:t>- Live Backend &amp; API: </a:t>
+            </a:r>
+            <a:r>
+              <a:rPr sz="780">
                 <a:solidFill>
                   <a:srgbClr val="222222"/>
                 </a:solidFill>
                 <a:latin typeface="Arial"/>
               </a:rPr>
-              <a:t>https://apaar-id-based-system.onrender.com/docs
-(FastAPI OpenAPI 3.1 live documentation with 73 endpoints across 67 paths)</a:t>
+              <a:t>https://apaar-id-based-system.onrender.com/docs (73 OpenAPI endpoints)</a:t>
             </a:r>
           </a:p>
           <a:p>
             <a:pPr>
               <a:spcBef>
-                <a:spcPts val="350"/>
+                <a:spcPts val="200"/>
               </a:spcBef>
             </a:pPr>
             <a:r>
-              <a:rPr sz="850" b="1">
+              <a:rPr sz="819" b="1">
                 <a:solidFill>
                   <a:srgbClr val="008C6E"/>
                 </a:solidFill>
                 <a:latin typeface="Arial"/>
               </a:rPr>
-              <a:t>- Open-Source GitHub Repository: </a:t>
-            </a:r>
-            <a:r>
-              <a:rPr sz="800">
+              <a:t>- Source Repository: </a:t>
+            </a:r>
+            <a:r>
+              <a:rPr sz="780">
                 <a:solidFill>
                   <a:srgbClr val="222222"/>
                 </a:solidFill>
                 <a:latin typeface="Arial"/>
               </a:rPr>
-              <a:t>https://github.com/naveeshpcbin/APAAR-ID-BASED-SYSTEM
-(Complete source code, 20 application models, Alembic migrations, test suites)</a:t>
+              <a:t>https://github.com/naveeshpcbin/APAAR-ID-BASED-SYSTEM (Full code, tests, migrations)</a:t>
             </a:r>
           </a:p>
           <a:p>
             <a:pPr>
               <a:spcBef>
-                <a:spcPts val="350"/>
+                <a:spcPts val="200"/>
               </a:spcBef>
             </a:pPr>
             <a:r>
-              <a:rPr sz="850" b="1">
+              <a:rPr sz="819" b="1">
                 <a:solidFill>
                   <a:srgbClr val="008C6E"/>
                 </a:solidFill>
                 <a:latin typeface="Arial"/>
               </a:rPr>
-              <a:t>- Verified Test Suite: </a:t>
-            </a:r>
-            <a:r>
-              <a:rPr sz="800">
+              <a:t>- Verification Status: </a:t>
+            </a:r>
+            <a:r>
+              <a:rPr sz="780">
                 <a:solidFill>
                   <a:srgbClr val="222222"/>
                 </a:solidFill>
                 <a:latin typeface="Arial"/>
               </a:rPr>
-              <a:t>66/66 pytest unit tests passing + 20/20 Phase F E2E checks + 10/10 live cloud integration tests verified.</a:t>
+              <a:t>66/66 Unit Tests + 20 Phase F E2E Checks + Live Cloud Verified</a:t>
             </a:r>
           </a:p>
         </p:txBody>
